--- a/outputs/ophthalmology-batch-20261011/ok_fitting/A4_color_editable.pptx
+++ b/outputs/ophthalmology-batch-20261011/ok_fitting/A4_color_editable.pptx
@@ -519,7 +519,7 @@
           <a:p/>
           <a:p>
             <a:r>
-              <a:t>ok_fitting-02 明确数值禁忌：8岁以下儿童；角膜内皮细胞密度少于2 000个/mm²，为原文禁忌证。</a:t>
+              <a:t>ok_fitting-02 明确数值禁忌：8岁以下儿童（原文表述，8岁整的边界未单独说明）；角膜内皮细胞密度少于2 000个/mm²，为原文禁忌证。</a:t>
             </a:r>
           </a:p>
           <a:p>
@@ -3977,7 +3977,7 @@
         <p:spPr>
           <a:xfrm>
             <a:off x="172720" y="762220"/>
-            <a:ext cx="3434560" cy="716280"/>
+            <a:ext cx="3434560" cy="863600"/>
           </a:xfrm>
           <a:prstGeom prst="rect">
             <a:avLst/>
@@ -4062,14 +4062,14 @@
       </p:sp>
       <p:sp>
         <p:nvSpPr>
-          <p:cNvPr id="7" name="按镜片注册范围；角膜曲率39.00～48.00 D；卫生、理解及依从性良好。禁忌：&lt;8岁，内皮密度&lt;"/>
+          <p:cNvPr id="7" name="按镜片注册范围；角膜曲率39.00～48.00 D；卫生、理解及依从性良好。禁忌：8岁以下（原文表述"/>
           <p:cNvSpPr txBox="1"/>
           <p:nvPr/>
         </p:nvSpPr>
         <p:spPr>
           <a:xfrm>
             <a:off x="274320" y="952720"/>
-            <a:ext cx="3231360" cy="358140"/>
+            <a:ext cx="3231360" cy="505459"/>
           </a:xfrm>
           <a:prstGeom prst="rect">
             <a:avLst/>
@@ -4126,7 +4126,31 @@
                 <a:ea typeface="Microsoft YaHei"/>
                 <a:cs typeface="Microsoft YaHei"/>
               </a:rPr>
-              <a:t>依从性良好。禁忌：&lt;8岁，内皮密度&lt;2 000个/mm²。</a:t>
+              <a:t>依从性良好。禁忌：8岁以下（原文表述），内皮密度&lt;2 000</a:t>
+            </a:r>
+          </a:p>
+          <a:p>
+            <a:pPr>
+              <a:lnSpc>
+                <a:spcPts val="1160"/>
+              </a:lnSpc>
+              <a:spcBef>
+                <a:spcPts val="0"/>
+              </a:spcBef>
+              <a:spcAft>
+                <a:spcPts val="0"/>
+              </a:spcAft>
+            </a:pPr>
+            <a:r>
+              <a:rPr sz="950" b="0" lang="zh-CN">
+                <a:solidFill>
+                  <a:srgbClr val="1E2E3B"/>
+                </a:solidFill>
+                <a:latin typeface="Microsoft YaHei"/>
+                <a:ea typeface="Microsoft YaHei"/>
+                <a:cs typeface="Microsoft YaHei"/>
+              </a:rPr>
+              <a:t>个/mm²。</a:t>
             </a:r>
           </a:p>
         </p:txBody>
@@ -4139,7 +4163,7 @@
         </p:nvSpPr>
         <p:spPr>
           <a:xfrm>
-            <a:off x="274320" y="1272760"/>
+            <a:off x="274320" y="1420080"/>
             <a:ext cx="3231360" cy="193040"/>
           </a:xfrm>
           <a:prstGeom prst="rect">
@@ -4186,7 +4210,7 @@
         </p:nvSpPr>
         <p:spPr>
           <a:xfrm>
-            <a:off x="172720" y="1529300"/>
+            <a:off x="172720" y="1676620"/>
             <a:ext cx="3434560" cy="863600"/>
           </a:xfrm>
           <a:prstGeom prst="rect">
@@ -4231,7 +4255,7 @@
         </p:nvSpPr>
         <p:spPr>
           <a:xfrm>
-            <a:off x="274320" y="1567400"/>
+            <a:off x="274320" y="1714720"/>
             <a:ext cx="3231360" cy="215900"/>
           </a:xfrm>
           <a:prstGeom prst="rect">
@@ -4278,7 +4302,7 @@
         </p:nvSpPr>
         <p:spPr>
           <a:xfrm>
-            <a:off x="274320" y="1719800"/>
+            <a:off x="274320" y="1867120"/>
             <a:ext cx="3231360" cy="505459"/>
           </a:xfrm>
           <a:prstGeom prst="rect">
@@ -4373,7 +4397,7 @@
         </p:nvSpPr>
         <p:spPr>
           <a:xfrm>
-            <a:off x="274320" y="2187160"/>
+            <a:off x="274320" y="2334480"/>
             <a:ext cx="3231360" cy="193040"/>
           </a:xfrm>
           <a:prstGeom prst="rect">
@@ -4420,7 +4444,7 @@
         </p:nvSpPr>
         <p:spPr>
           <a:xfrm>
-            <a:off x="172720" y="2443700"/>
+            <a:off x="172720" y="2591020"/>
             <a:ext cx="3434560" cy="716280"/>
           </a:xfrm>
           <a:prstGeom prst="rect">
@@ -4465,7 +4489,7 @@
         </p:nvSpPr>
         <p:spPr>
           <a:xfrm>
-            <a:off x="274320" y="2481800"/>
+            <a:off x="274320" y="2629120"/>
             <a:ext cx="3231360" cy="215900"/>
           </a:xfrm>
           <a:prstGeom prst="rect">
@@ -4512,7 +4536,7 @@
         </p:nvSpPr>
         <p:spPr>
           <a:xfrm>
-            <a:off x="274320" y="2634200"/>
+            <a:off x="274320" y="2781520"/>
             <a:ext cx="3231360" cy="358140"/>
           </a:xfrm>
           <a:prstGeom prst="rect">
@@ -4583,7 +4607,7 @@
         </p:nvSpPr>
         <p:spPr>
           <a:xfrm>
-            <a:off x="274320" y="2954240"/>
+            <a:off x="274320" y="3101560"/>
             <a:ext cx="3231360" cy="193040"/>
           </a:xfrm>
           <a:prstGeom prst="rect">
@@ -4630,7 +4654,7 @@
         </p:nvSpPr>
         <p:spPr>
           <a:xfrm>
-            <a:off x="172720" y="3210780"/>
+            <a:off x="172720" y="3358100"/>
             <a:ext cx="3434560" cy="716280"/>
           </a:xfrm>
           <a:prstGeom prst="rect">
@@ -4675,7 +4699,7 @@
         </p:nvSpPr>
         <p:spPr>
           <a:xfrm>
-            <a:off x="274320" y="3248880"/>
+            <a:off x="274320" y="3396200"/>
             <a:ext cx="3231360" cy="215900"/>
           </a:xfrm>
           <a:prstGeom prst="rect">
@@ -4722,7 +4746,7 @@
         </p:nvSpPr>
         <p:spPr>
           <a:xfrm>
-            <a:off x="274320" y="3401280"/>
+            <a:off x="274320" y="3548600"/>
             <a:ext cx="3231360" cy="358140"/>
           </a:xfrm>
           <a:prstGeom prst="rect">
@@ -4793,7 +4817,7 @@
         </p:nvSpPr>
         <p:spPr>
           <a:xfrm>
-            <a:off x="274320" y="3721320"/>
+            <a:off x="274320" y="3868640"/>
             <a:ext cx="3231360" cy="193040"/>
           </a:xfrm>
           <a:prstGeom prst="rect">
@@ -5049,7 +5073,7 @@
         <p:spPr>
           <a:xfrm>
             <a:off x="3952720" y="762220"/>
-            <a:ext cx="3434560" cy="716280"/>
+            <a:ext cx="3434560" cy="863600"/>
           </a:xfrm>
           <a:prstGeom prst="rect">
             <a:avLst/>
@@ -5134,14 +5158,14 @@
       </p:sp>
       <p:sp>
         <p:nvSpPr>
-          <p:cNvPr id="27" name="按镜片注册范围；角膜曲率39.00～48.00 D；卫生、理解及依从性良好。禁忌：&lt;8岁，内皮密度&lt;"/>
+          <p:cNvPr id="27" name="按镜片注册范围；角膜曲率39.00～48.00 D；卫生、理解及依从性良好。禁忌：8岁以下（原文表述"/>
           <p:cNvSpPr txBox="1"/>
           <p:nvPr/>
         </p:nvSpPr>
         <p:spPr>
           <a:xfrm>
             <a:off x="4054320" y="952720"/>
-            <a:ext cx="3231360" cy="358140"/>
+            <a:ext cx="3231360" cy="505459"/>
           </a:xfrm>
           <a:prstGeom prst="rect">
             <a:avLst/>
@@ -5198,7 +5222,31 @@
                 <a:ea typeface="Microsoft YaHei"/>
                 <a:cs typeface="Microsoft YaHei"/>
               </a:rPr>
-              <a:t>依从性良好。禁忌：&lt;8岁，内皮密度&lt;2 000个/mm²。</a:t>
+              <a:t>依从性良好。禁忌：8岁以下（原文表述），内皮密度&lt;2 000</a:t>
+            </a:r>
+          </a:p>
+          <a:p>
+            <a:pPr>
+              <a:lnSpc>
+                <a:spcPts val="1160"/>
+              </a:lnSpc>
+              <a:spcBef>
+                <a:spcPts val="0"/>
+              </a:spcBef>
+              <a:spcAft>
+                <a:spcPts val="0"/>
+              </a:spcAft>
+            </a:pPr>
+            <a:r>
+              <a:rPr sz="950" b="0" lang="zh-CN">
+                <a:solidFill>
+                  <a:srgbClr val="1E2E3B"/>
+                </a:solidFill>
+                <a:latin typeface="Microsoft YaHei"/>
+                <a:ea typeface="Microsoft YaHei"/>
+                <a:cs typeface="Microsoft YaHei"/>
+              </a:rPr>
+              <a:t>个/mm²。</a:t>
             </a:r>
           </a:p>
         </p:txBody>
@@ -5211,7 +5259,7 @@
         </p:nvSpPr>
         <p:spPr>
           <a:xfrm>
-            <a:off x="4054320" y="1272760"/>
+            <a:off x="4054320" y="1420080"/>
             <a:ext cx="3231360" cy="193040"/>
           </a:xfrm>
           <a:prstGeom prst="rect">
@@ -5258,7 +5306,7 @@
         </p:nvSpPr>
         <p:spPr>
           <a:xfrm>
-            <a:off x="3952720" y="1529300"/>
+            <a:off x="3952720" y="1676620"/>
             <a:ext cx="3434560" cy="863600"/>
           </a:xfrm>
           <a:prstGeom prst="rect">
@@ -5303,7 +5351,7 @@
         </p:nvSpPr>
         <p:spPr>
           <a:xfrm>
-            <a:off x="4054320" y="1567400"/>
+            <a:off x="4054320" y="1714720"/>
             <a:ext cx="3231360" cy="215900"/>
           </a:xfrm>
           <a:prstGeom prst="rect">
@@ -5350,7 +5398,7 @@
         </p:nvSpPr>
         <p:spPr>
           <a:xfrm>
-            <a:off x="4054320" y="1719800"/>
+            <a:off x="4054320" y="1867120"/>
             <a:ext cx="3231360" cy="505459"/>
           </a:xfrm>
           <a:prstGeom prst="rect">
@@ -5445,7 +5493,7 @@
         </p:nvSpPr>
         <p:spPr>
           <a:xfrm>
-            <a:off x="4054320" y="2187160"/>
+            <a:off x="4054320" y="2334480"/>
             <a:ext cx="3231360" cy="193040"/>
           </a:xfrm>
           <a:prstGeom prst="rect">
@@ -5492,7 +5540,7 @@
         </p:nvSpPr>
         <p:spPr>
           <a:xfrm>
-            <a:off x="3952720" y="2443700"/>
+            <a:off x="3952720" y="2591020"/>
             <a:ext cx="3434560" cy="716280"/>
           </a:xfrm>
           <a:prstGeom prst="rect">
@@ -5537,7 +5585,7 @@
         </p:nvSpPr>
         <p:spPr>
           <a:xfrm>
-            <a:off x="4054320" y="2481800"/>
+            <a:off x="4054320" y="2629120"/>
             <a:ext cx="3231360" cy="215900"/>
           </a:xfrm>
           <a:prstGeom prst="rect">
@@ -5584,7 +5632,7 @@
         </p:nvSpPr>
         <p:spPr>
           <a:xfrm>
-            <a:off x="4054320" y="2634200"/>
+            <a:off x="4054320" y="2781520"/>
             <a:ext cx="3231360" cy="358140"/>
           </a:xfrm>
           <a:prstGeom prst="rect">
@@ -5655,7 +5703,7 @@
         </p:nvSpPr>
         <p:spPr>
           <a:xfrm>
-            <a:off x="4054320" y="2954240"/>
+            <a:off x="4054320" y="3101560"/>
             <a:ext cx="3231360" cy="193040"/>
           </a:xfrm>
           <a:prstGeom prst="rect">
@@ -5702,7 +5750,7 @@
         </p:nvSpPr>
         <p:spPr>
           <a:xfrm>
-            <a:off x="3952720" y="3210780"/>
+            <a:off x="3952720" y="3358100"/>
             <a:ext cx="3434560" cy="716280"/>
           </a:xfrm>
           <a:prstGeom prst="rect">
@@ -5747,7 +5795,7 @@
         </p:nvSpPr>
         <p:spPr>
           <a:xfrm>
-            <a:off x="4054320" y="3248880"/>
+            <a:off x="4054320" y="3396200"/>
             <a:ext cx="3231360" cy="215900"/>
           </a:xfrm>
           <a:prstGeom prst="rect">
@@ -5794,7 +5842,7 @@
         </p:nvSpPr>
         <p:spPr>
           <a:xfrm>
-            <a:off x="4054320" y="3401280"/>
+            <a:off x="4054320" y="3548600"/>
             <a:ext cx="3231360" cy="358140"/>
           </a:xfrm>
           <a:prstGeom prst="rect">
@@ -5865,7 +5913,7 @@
         </p:nvSpPr>
         <p:spPr>
           <a:xfrm>
-            <a:off x="4054320" y="3721320"/>
+            <a:off x="4054320" y="3868640"/>
             <a:ext cx="3231360" cy="193040"/>
           </a:xfrm>
           <a:prstGeom prst="rect">
@@ -6121,7 +6169,7 @@
         <p:spPr>
           <a:xfrm>
             <a:off x="172720" y="6090220"/>
-            <a:ext cx="3434560" cy="716280"/>
+            <a:ext cx="3434560" cy="863600"/>
           </a:xfrm>
           <a:prstGeom prst="rect">
             <a:avLst/>
@@ -6206,14 +6254,14 @@
       </p:sp>
       <p:sp>
         <p:nvSpPr>
-          <p:cNvPr id="47" name="按镜片注册范围；角膜曲率39.00～48.00 D；卫生、理解及依从性良好。禁忌：&lt;8岁，内皮密度&lt;"/>
+          <p:cNvPr id="47" name="按镜片注册范围；角膜曲率39.00～48.00 D；卫生、理解及依从性良好。禁忌：8岁以下（原文表述"/>
           <p:cNvSpPr txBox="1"/>
           <p:nvPr/>
         </p:nvSpPr>
         <p:spPr>
           <a:xfrm>
             <a:off x="274320" y="6280720"/>
-            <a:ext cx="3231360" cy="358140"/>
+            <a:ext cx="3231360" cy="505459"/>
           </a:xfrm>
           <a:prstGeom prst="rect">
             <a:avLst/>
@@ -6270,7 +6318,31 @@
                 <a:ea typeface="Microsoft YaHei"/>
                 <a:cs typeface="Microsoft YaHei"/>
               </a:rPr>
-              <a:t>依从性良好。禁忌：&lt;8岁，内皮密度&lt;2 000个/mm²。</a:t>
+              <a:t>依从性良好。禁忌：8岁以下（原文表述），内皮密度&lt;2 000</a:t>
+            </a:r>
+          </a:p>
+          <a:p>
+            <a:pPr>
+              <a:lnSpc>
+                <a:spcPts val="1160"/>
+              </a:lnSpc>
+              <a:spcBef>
+                <a:spcPts val="0"/>
+              </a:spcBef>
+              <a:spcAft>
+                <a:spcPts val="0"/>
+              </a:spcAft>
+            </a:pPr>
+            <a:r>
+              <a:rPr sz="950" b="0" lang="zh-CN">
+                <a:solidFill>
+                  <a:srgbClr val="1E2E3B"/>
+                </a:solidFill>
+                <a:latin typeface="Microsoft YaHei"/>
+                <a:ea typeface="Microsoft YaHei"/>
+                <a:cs typeface="Microsoft YaHei"/>
+              </a:rPr>
+              <a:t>个/mm²。</a:t>
             </a:r>
           </a:p>
         </p:txBody>
@@ -6283,7 +6355,7 @@
         </p:nvSpPr>
         <p:spPr>
           <a:xfrm>
-            <a:off x="274320" y="6600760"/>
+            <a:off x="274320" y="6748080"/>
             <a:ext cx="3231360" cy="193040"/>
           </a:xfrm>
           <a:prstGeom prst="rect">
@@ -6330,7 +6402,7 @@
         </p:nvSpPr>
         <p:spPr>
           <a:xfrm>
-            <a:off x="172720" y="6857300"/>
+            <a:off x="172720" y="7004620"/>
             <a:ext cx="3434560" cy="863600"/>
           </a:xfrm>
           <a:prstGeom prst="rect">
@@ -6375,7 +6447,7 @@
         </p:nvSpPr>
         <p:spPr>
           <a:xfrm>
-            <a:off x="274320" y="6895400"/>
+            <a:off x="274320" y="7042720"/>
             <a:ext cx="3231360" cy="215900"/>
           </a:xfrm>
           <a:prstGeom prst="rect">
@@ -6422,7 +6494,7 @@
         </p:nvSpPr>
         <p:spPr>
           <a:xfrm>
-            <a:off x="274320" y="7047800"/>
+            <a:off x="274320" y="7195120"/>
             <a:ext cx="3231360" cy="505459"/>
           </a:xfrm>
           <a:prstGeom prst="rect">
@@ -6517,7 +6589,7 @@
         </p:nvSpPr>
         <p:spPr>
           <a:xfrm>
-            <a:off x="274320" y="7515160"/>
+            <a:off x="274320" y="7662480"/>
             <a:ext cx="3231360" cy="193040"/>
           </a:xfrm>
           <a:prstGeom prst="rect">
@@ -6564,7 +6636,7 @@
         </p:nvSpPr>
         <p:spPr>
           <a:xfrm>
-            <a:off x="172720" y="7771700"/>
+            <a:off x="172720" y="7919020"/>
             <a:ext cx="3434560" cy="716280"/>
           </a:xfrm>
           <a:prstGeom prst="rect">
@@ -6609,7 +6681,7 @@
         </p:nvSpPr>
         <p:spPr>
           <a:xfrm>
-            <a:off x="274320" y="7809800"/>
+            <a:off x="274320" y="7957120"/>
             <a:ext cx="3231360" cy="215900"/>
           </a:xfrm>
           <a:prstGeom prst="rect">
@@ -6656,7 +6728,7 @@
         </p:nvSpPr>
         <p:spPr>
           <a:xfrm>
-            <a:off x="274320" y="7962200"/>
+            <a:off x="274320" y="8109520"/>
             <a:ext cx="3231360" cy="358140"/>
           </a:xfrm>
           <a:prstGeom prst="rect">
@@ -6727,7 +6799,7 @@
         </p:nvSpPr>
         <p:spPr>
           <a:xfrm>
-            <a:off x="274320" y="8282240"/>
+            <a:off x="274320" y="8429560"/>
             <a:ext cx="3231360" cy="193040"/>
           </a:xfrm>
           <a:prstGeom prst="rect">
@@ -6774,7 +6846,7 @@
         </p:nvSpPr>
         <p:spPr>
           <a:xfrm>
-            <a:off x="172720" y="8538780"/>
+            <a:off x="172720" y="8686100"/>
             <a:ext cx="3434560" cy="716280"/>
           </a:xfrm>
           <a:prstGeom prst="rect">
@@ -6819,7 +6891,7 @@
         </p:nvSpPr>
         <p:spPr>
           <a:xfrm>
-            <a:off x="274320" y="8576880"/>
+            <a:off x="274320" y="8724200"/>
             <a:ext cx="3231360" cy="215900"/>
           </a:xfrm>
           <a:prstGeom prst="rect">
@@ -6866,7 +6938,7 @@
         </p:nvSpPr>
         <p:spPr>
           <a:xfrm>
-            <a:off x="274320" y="8729280"/>
+            <a:off x="274320" y="8876600"/>
             <a:ext cx="3231360" cy="358140"/>
           </a:xfrm>
           <a:prstGeom prst="rect">
@@ -6937,7 +7009,7 @@
         </p:nvSpPr>
         <p:spPr>
           <a:xfrm>
-            <a:off x="274320" y="9049320"/>
+            <a:off x="274320" y="9196640"/>
             <a:ext cx="3231360" cy="193040"/>
           </a:xfrm>
           <a:prstGeom prst="rect">
@@ -7193,7 +7265,7 @@
         <p:spPr>
           <a:xfrm>
             <a:off x="3952720" y="6090220"/>
-            <a:ext cx="3434560" cy="716280"/>
+            <a:ext cx="3434560" cy="863600"/>
           </a:xfrm>
           <a:prstGeom prst="rect">
             <a:avLst/>
@@ -7278,14 +7350,14 @@
       </p:sp>
       <p:sp>
         <p:nvSpPr>
-          <p:cNvPr id="67" name="按镜片注册范围；角膜曲率39.00～48.00 D；卫生、理解及依从性良好。禁忌：&lt;8岁，内皮密度&lt;"/>
+          <p:cNvPr id="67" name="按镜片注册范围；角膜曲率39.00～48.00 D；卫生、理解及依从性良好。禁忌：8岁以下（原文表述"/>
           <p:cNvSpPr txBox="1"/>
           <p:nvPr/>
         </p:nvSpPr>
         <p:spPr>
           <a:xfrm>
             <a:off x="4054320" y="6280720"/>
-            <a:ext cx="3231360" cy="358140"/>
+            <a:ext cx="3231360" cy="505459"/>
           </a:xfrm>
           <a:prstGeom prst="rect">
             <a:avLst/>
@@ -7342,7 +7414,31 @@
                 <a:ea typeface="Microsoft YaHei"/>
                 <a:cs typeface="Microsoft YaHei"/>
               </a:rPr>
-              <a:t>依从性良好。禁忌：&lt;8岁，内皮密度&lt;2 000个/mm²。</a:t>
+              <a:t>依从性良好。禁忌：8岁以下（原文表述），内皮密度&lt;2 000</a:t>
+            </a:r>
+          </a:p>
+          <a:p>
+            <a:pPr>
+              <a:lnSpc>
+                <a:spcPts val="1160"/>
+              </a:lnSpc>
+              <a:spcBef>
+                <a:spcPts val="0"/>
+              </a:spcBef>
+              <a:spcAft>
+                <a:spcPts val="0"/>
+              </a:spcAft>
+            </a:pPr>
+            <a:r>
+              <a:rPr sz="950" b="0" lang="zh-CN">
+                <a:solidFill>
+                  <a:srgbClr val="1E2E3B"/>
+                </a:solidFill>
+                <a:latin typeface="Microsoft YaHei"/>
+                <a:ea typeface="Microsoft YaHei"/>
+                <a:cs typeface="Microsoft YaHei"/>
+              </a:rPr>
+              <a:t>个/mm²。</a:t>
             </a:r>
           </a:p>
         </p:txBody>
@@ -7355,7 +7451,7 @@
         </p:nvSpPr>
         <p:spPr>
           <a:xfrm>
-            <a:off x="4054320" y="6600760"/>
+            <a:off x="4054320" y="6748080"/>
             <a:ext cx="3231360" cy="193040"/>
           </a:xfrm>
           <a:prstGeom prst="rect">
@@ -7402,7 +7498,7 @@
         </p:nvSpPr>
         <p:spPr>
           <a:xfrm>
-            <a:off x="3952720" y="6857300"/>
+            <a:off x="3952720" y="7004620"/>
             <a:ext cx="3434560" cy="863600"/>
           </a:xfrm>
           <a:prstGeom prst="rect">
@@ -7447,7 +7543,7 @@
         </p:nvSpPr>
         <p:spPr>
           <a:xfrm>
-            <a:off x="4054320" y="6895400"/>
+            <a:off x="4054320" y="7042720"/>
             <a:ext cx="3231360" cy="215900"/>
           </a:xfrm>
           <a:prstGeom prst="rect">
@@ -7494,7 +7590,7 @@
         </p:nvSpPr>
         <p:spPr>
           <a:xfrm>
-            <a:off x="4054320" y="7047800"/>
+            <a:off x="4054320" y="7195120"/>
             <a:ext cx="3231360" cy="505459"/>
           </a:xfrm>
           <a:prstGeom prst="rect">
@@ -7589,7 +7685,7 @@
         </p:nvSpPr>
         <p:spPr>
           <a:xfrm>
-            <a:off x="4054320" y="7515160"/>
+            <a:off x="4054320" y="7662480"/>
             <a:ext cx="3231360" cy="193040"/>
           </a:xfrm>
           <a:prstGeom prst="rect">
@@ -7636,7 +7732,7 @@
         </p:nvSpPr>
         <p:spPr>
           <a:xfrm>
-            <a:off x="3952720" y="7771700"/>
+            <a:off x="3952720" y="7919020"/>
             <a:ext cx="3434560" cy="716280"/>
           </a:xfrm>
           <a:prstGeom prst="rect">
@@ -7681,7 +7777,7 @@
         </p:nvSpPr>
         <p:spPr>
           <a:xfrm>
-            <a:off x="4054320" y="7809800"/>
+            <a:off x="4054320" y="7957120"/>
             <a:ext cx="3231360" cy="215900"/>
           </a:xfrm>
           <a:prstGeom prst="rect">
@@ -7728,7 +7824,7 @@
         </p:nvSpPr>
         <p:spPr>
           <a:xfrm>
-            <a:off x="4054320" y="7962200"/>
+            <a:off x="4054320" y="8109520"/>
             <a:ext cx="3231360" cy="358140"/>
           </a:xfrm>
           <a:prstGeom prst="rect">
@@ -7799,7 +7895,7 @@
         </p:nvSpPr>
         <p:spPr>
           <a:xfrm>
-            <a:off x="4054320" y="8282240"/>
+            <a:off x="4054320" y="8429560"/>
             <a:ext cx="3231360" cy="193040"/>
           </a:xfrm>
           <a:prstGeom prst="rect">
@@ -7846,7 +7942,7 @@
         </p:nvSpPr>
         <p:spPr>
           <a:xfrm>
-            <a:off x="3952720" y="8538780"/>
+            <a:off x="3952720" y="8686100"/>
             <a:ext cx="3434560" cy="716280"/>
           </a:xfrm>
           <a:prstGeom prst="rect">
@@ -7891,7 +7987,7 @@
         </p:nvSpPr>
         <p:spPr>
           <a:xfrm>
-            <a:off x="4054320" y="8576880"/>
+            <a:off x="4054320" y="8724200"/>
             <a:ext cx="3231360" cy="215900"/>
           </a:xfrm>
           <a:prstGeom prst="rect">
@@ -7938,7 +8034,7 @@
         </p:nvSpPr>
         <p:spPr>
           <a:xfrm>
-            <a:off x="4054320" y="8729280"/>
+            <a:off x="4054320" y="8876600"/>
             <a:ext cx="3231360" cy="358140"/>
           </a:xfrm>
           <a:prstGeom prst="rect">
@@ -8009,7 +8105,7 @@
         </p:nvSpPr>
         <p:spPr>
           <a:xfrm>
-            <a:off x="4054320" y="9049320"/>
+            <a:off x="4054320" y="9196640"/>
             <a:ext cx="3231360" cy="193040"/>
           </a:xfrm>
           <a:prstGeom prst="rect">
